--- a/Népesség 2025 projekt.pptx
+++ b/Népesség 2025 projekt.pptx
@@ -108,6 +108,11 @@
       </a:defRPr>
     </a:lvl9pPr>
   </p:defaultTextStyle>
+  <p:extLst>
+    <p:ext uri="{EFAFB233-063F-42B5-8137-9DF3F51BA10A}">
+      <p15:sldGuideLst xmlns:p15="http://schemas.microsoft.com/office/powerpoint/2012/main"/>
+    </p:ext>
+  </p:extLst>
 </p:presentation>
 </file>
 
@@ -508,7 +513,7 @@
           </a:lstStyle>
           <a:p>
             <a:r>
-              <a:rPr lang="hu-HU"/>
+              <a:rPr lang="hu-HU" dirty="0"/>
               <a:t>Mintacím szerkesztése</a:t>
             </a:r>
           </a:p>
@@ -541,7 +546,9 @@
           <a:lstStyle>
             <a:lvl1pPr marL="0" indent="0" algn="ctr">
               <a:buNone/>
-              <a:defRPr sz="2400"/>
+              <a:defRPr sz="2400">
+                <a:latin typeface="Georgia" panose="02040502050405020303" pitchFamily="18" charset="0"/>
+              </a:defRPr>
             </a:lvl1pPr>
             <a:lvl2pPr marL="457200" indent="0" algn="ctr">
               <a:buNone/>
@@ -578,7 +585,7 @@
           </a:lstStyle>
           <a:p>
             <a:r>
-              <a:rPr lang="hu-HU"/>
+              <a:rPr lang="hu-HU" dirty="0"/>
               <a:t>Kattintson ide az alcím mintájának szerkesztéséhez</a:t>
             </a:r>
           </a:p>
@@ -605,7 +612,7 @@
           <a:bodyPr/>
           <a:lstStyle/>
           <a:p>
-            <a:fld id="{EC8C4F6B-1032-41D2-9ACE-AD46423EBB11}" type="datetime1">
+            <a:fld id="{E1F56041-F78F-46FB-9DD9-5EEFE30E9918}" type="datetime1">
               <a:rPr lang="hu-HU" smtClean="0"/>
               <a:t>2026. 09. 18.</a:t>
             </a:fld>
@@ -813,7 +820,7 @@
           <a:bodyPr/>
           <a:lstStyle/>
           <a:p>
-            <a:fld id="{388DDDA8-2588-4C31-BB98-C30C6B292076}" type="datetime1">
+            <a:fld id="{1CB45633-A540-4BA4-9503-37AACDF1BF7B}" type="datetime1">
               <a:rPr lang="hu-HU" smtClean="0"/>
               <a:t>2026. 09. 18.</a:t>
             </a:fld>
@@ -1021,7 +1028,7 @@
           <a:bodyPr/>
           <a:lstStyle/>
           <a:p>
-            <a:fld id="{D1F4E5F8-1696-49D8-9530-1DDE0500A466}" type="datetime1">
+            <a:fld id="{47703415-C3F8-41AA-8696-66C196C56785}" type="datetime1">
               <a:rPr lang="hu-HU" smtClean="0"/>
               <a:t>2026. 09. 18.</a:t>
             </a:fld>
@@ -1219,7 +1226,7 @@
           <a:bodyPr/>
           <a:lstStyle/>
           <a:p>
-            <a:fld id="{EA61271A-CABC-4FB2-8CD9-BA20AF9293F8}" type="datetime1">
+            <a:fld id="{56682343-3180-46FB-B3C4-E2A140C8BC6B}" type="datetime1">
               <a:rPr lang="hu-HU" smtClean="0"/>
               <a:t>2026. 09. 18.</a:t>
             </a:fld>
@@ -1270,7 +1277,7 @@
         </p:nvSpPr>
         <p:spPr>
           <a:xfrm>
-            <a:off x="9264976" y="6233687"/>
+            <a:off x="9323699" y="6310312"/>
             <a:ext cx="2743200" cy="365125"/>
           </a:xfrm>
         </p:spPr>
@@ -1278,7 +1285,7 @@
           <a:bodyPr/>
           <a:lstStyle>
             <a:lvl1pPr>
-              <a:defRPr sz="3200"/>
+              <a:defRPr sz="2800"/>
             </a:lvl1pPr>
           </a:lstStyle>
           <a:p>
@@ -1477,7 +1484,7 @@
           <a:p>
             <a:pPr lvl="0"/>
             <a:r>
-              <a:rPr lang="hu-HU"/>
+              <a:rPr lang="hu-HU" dirty="0"/>
               <a:t>Mintaszöveg szerkesztése</a:t>
             </a:r>
           </a:p>
@@ -1504,7 +1511,7 @@
           <a:bodyPr/>
           <a:lstStyle/>
           <a:p>
-            <a:fld id="{D7451CB2-2E1E-498A-B506-2F5C5FDE7C13}" type="datetime1">
+            <a:fld id="{1B049D67-91FC-47B5-88DE-434B7642A4E4}" type="datetime1">
               <a:rPr lang="hu-HU" smtClean="0"/>
               <a:t>2026. 09. 18.</a:t>
             </a:fld>
@@ -1553,16 +1560,26 @@
             <p:ph type="sldNum" sz="quarter" idx="12"/>
           </p:nvPr>
         </p:nvSpPr>
-        <p:spPr/>
-        <p:txBody>
-          <a:bodyPr/>
-          <a:lstStyle/>
+        <p:spPr>
+          <a:xfrm>
+            <a:off x="9147495" y="6307909"/>
+            <a:ext cx="2743200" cy="365125"/>
+          </a:xfrm>
+        </p:spPr>
+        <p:txBody>
+          <a:bodyPr/>
+          <a:lstStyle>
+            <a:lvl1pPr>
+              <a:defRPr sz="2800"/>
+            </a:lvl1pPr>
+          </a:lstStyle>
           <a:p>
             <a:fld id="{1FABDF30-A028-4ADD-87D6-07D5E0A35220}" type="slidenum">
               <a:rPr lang="hu-HU" smtClean="0"/>
+              <a:pPr/>
               <a:t>‹#›</a:t>
             </a:fld>
-            <a:endParaRPr lang="hu-HU"/>
+            <a:endParaRPr lang="hu-HU" dirty="0"/>
           </a:p>
         </p:txBody>
       </p:sp>
@@ -1714,35 +1731,35 @@
           <a:p>
             <a:pPr lvl="0"/>
             <a:r>
-              <a:rPr lang="hu-HU"/>
+              <a:rPr lang="hu-HU" dirty="0"/>
               <a:t>Mintaszöveg szerkesztése</a:t>
             </a:r>
           </a:p>
           <a:p>
             <a:pPr lvl="1"/>
             <a:r>
-              <a:rPr lang="hu-HU"/>
+              <a:rPr lang="hu-HU" dirty="0"/>
               <a:t>Második szint</a:t>
             </a:r>
           </a:p>
           <a:p>
             <a:pPr lvl="2"/>
             <a:r>
-              <a:rPr lang="hu-HU"/>
+              <a:rPr lang="hu-HU" dirty="0"/>
               <a:t>Harmadik szint</a:t>
             </a:r>
           </a:p>
           <a:p>
             <a:pPr lvl="3"/>
             <a:r>
-              <a:rPr lang="hu-HU"/>
+              <a:rPr lang="hu-HU" dirty="0"/>
               <a:t>Negyedik szint</a:t>
             </a:r>
           </a:p>
           <a:p>
             <a:pPr lvl="4"/>
             <a:r>
-              <a:rPr lang="hu-HU"/>
+              <a:rPr lang="hu-HU" dirty="0"/>
               <a:t>Ötödik szint</a:t>
             </a:r>
           </a:p>
@@ -1769,7 +1786,7 @@
           <a:bodyPr/>
           <a:lstStyle/>
           <a:p>
-            <a:fld id="{2E097600-7A2F-4F41-B87B-4510D468C8A4}" type="datetime1">
+            <a:fld id="{48C48760-715D-48F2-BD53-7504C96B2800}" type="datetime1">
               <a:rPr lang="hu-HU" smtClean="0"/>
               <a:t>2026. 09. 18.</a:t>
             </a:fld>
@@ -1818,16 +1835,26 @@
             <p:ph type="sldNum" sz="quarter" idx="12"/>
           </p:nvPr>
         </p:nvSpPr>
-        <p:spPr/>
-        <p:txBody>
-          <a:bodyPr/>
-          <a:lstStyle/>
+        <p:spPr>
+          <a:xfrm>
+            <a:off x="9357220" y="6310312"/>
+            <a:ext cx="2743200" cy="365125"/>
+          </a:xfrm>
+        </p:spPr>
+        <p:txBody>
+          <a:bodyPr/>
+          <a:lstStyle>
+            <a:lvl1pPr>
+              <a:defRPr sz="2800"/>
+            </a:lvl1pPr>
+          </a:lstStyle>
           <a:p>
             <a:fld id="{1FABDF30-A028-4ADD-87D6-07D5E0A35220}" type="slidenum">
               <a:rPr lang="hu-HU" smtClean="0"/>
+              <a:pPr/>
               <a:t>‹#›</a:t>
             </a:fld>
-            <a:endParaRPr lang="hu-HU"/>
+            <a:endParaRPr lang="hu-HU" dirty="0"/>
           </a:p>
         </p:txBody>
       </p:sp>
@@ -2176,12 +2203,17 @@
             <p:ph type="dt" sz="half" idx="10"/>
           </p:nvPr>
         </p:nvSpPr>
-        <p:spPr/>
-        <p:txBody>
-          <a:bodyPr/>
-          <a:lstStyle/>
-          <a:p>
-            <a:fld id="{370977B9-B0BF-4E0B-934F-1A4125C46A60}" type="datetime1">
+        <p:spPr>
+          <a:xfrm>
+            <a:off x="200637" y="6356350"/>
+            <a:ext cx="2743200" cy="365125"/>
+          </a:xfrm>
+        </p:spPr>
+        <p:txBody>
+          <a:bodyPr/>
+          <a:lstStyle/>
+          <a:p>
+            <a:fld id="{22A7F8D9-AF72-4E6A-9A90-15EB298345A2}" type="datetime1">
               <a:rPr lang="hu-HU" smtClean="0"/>
               <a:t>2026. 09. 18.</a:t>
             </a:fld>
@@ -2230,16 +2262,26 @@
             <p:ph type="sldNum" sz="quarter" idx="12"/>
           </p:nvPr>
         </p:nvSpPr>
-        <p:spPr/>
-        <p:txBody>
-          <a:bodyPr/>
-          <a:lstStyle/>
+        <p:spPr>
+          <a:xfrm>
+            <a:off x="9248163" y="6310312"/>
+            <a:ext cx="2743200" cy="365125"/>
+          </a:xfrm>
+        </p:spPr>
+        <p:txBody>
+          <a:bodyPr/>
+          <a:lstStyle>
+            <a:lvl1pPr>
+              <a:defRPr sz="2800"/>
+            </a:lvl1pPr>
+          </a:lstStyle>
           <a:p>
             <a:fld id="{1FABDF30-A028-4ADD-87D6-07D5E0A35220}" type="slidenum">
               <a:rPr lang="hu-HU" smtClean="0"/>
+              <a:pPr/>
               <a:t>‹#›</a:t>
             </a:fld>
-            <a:endParaRPr lang="hu-HU"/>
+            <a:endParaRPr lang="hu-HU" dirty="0"/>
           </a:p>
         </p:txBody>
       </p:sp>
@@ -2322,7 +2364,7 @@
           <a:bodyPr/>
           <a:lstStyle/>
           <a:p>
-            <a:fld id="{7E0A7E59-9044-4CB4-902E-C3AE03875FF1}" type="datetime1">
+            <a:fld id="{E451E4E6-2A82-4E5D-BD47-87D6F8C650FB}" type="datetime1">
               <a:rPr lang="hu-HU" smtClean="0"/>
               <a:t>2026. 09. 18.</a:t>
             </a:fld>
@@ -2435,7 +2477,7 @@
           <a:bodyPr/>
           <a:lstStyle/>
           <a:p>
-            <a:fld id="{8DBDD196-E464-4180-A7FE-E2BF7408B50A}" type="datetime1">
+            <a:fld id="{C61FE8E8-BF58-4CDA-AF5C-5BEAA77F4788}" type="datetime1">
               <a:rPr lang="hu-HU" smtClean="0"/>
               <a:t>2026. 09. 18.</a:t>
             </a:fld>
@@ -2746,7 +2788,7 @@
           <a:bodyPr/>
           <a:lstStyle/>
           <a:p>
-            <a:fld id="{A3A73441-6772-4848-B1B3-813277F1546A}" type="datetime1">
+            <a:fld id="{39EDC4CA-614F-4B8D-BF7C-29228988EFC5}" type="datetime1">
               <a:rPr lang="hu-HU" smtClean="0"/>
               <a:t>2026. 09. 18.</a:t>
             </a:fld>
@@ -3034,7 +3076,7 @@
           <a:bodyPr/>
           <a:lstStyle/>
           <a:p>
-            <a:fld id="{1B0DC25B-6AD2-41F9-BA73-9C719AD62C21}" type="datetime1">
+            <a:fld id="{3B86B231-57CE-4A89-85CD-A03E237611E0}" type="datetime1">
               <a:rPr lang="hu-HU" smtClean="0"/>
               <a:t>2026. 09. 18.</a:t>
             </a:fld>
@@ -3275,7 +3317,7 @@
         </p:nvSpPr>
         <p:spPr>
           <a:xfrm>
-            <a:off x="838200" y="6356350"/>
+            <a:off x="225458" y="6356350"/>
             <a:ext cx="2743200" cy="365125"/>
           </a:xfrm>
           <a:prstGeom prst="rect">
@@ -3294,7 +3336,7 @@
             </a:lvl1pPr>
           </a:lstStyle>
           <a:p>
-            <a:fld id="{E77091EC-45E5-4C7A-AB24-5365FAA4856A}" type="datetime1">
+            <a:fld id="{79FE6BD6-CDEC-46C5-9AC8-9B5089C429BC}" type="datetime1">
               <a:rPr lang="hu-HU" smtClean="0"/>
               <a:t>2026. 09. 18.</a:t>
             </a:fld>
@@ -3363,7 +3405,7 @@
         </p:nvSpPr>
         <p:spPr>
           <a:xfrm>
-            <a:off x="9104720" y="6240396"/>
+            <a:off x="9223342" y="6240396"/>
             <a:ext cx="2743200" cy="365125"/>
           </a:xfrm>
           <a:prstGeom prst="rect">
@@ -4017,7 +4059,7 @@
           <a:bodyPr/>
           <a:lstStyle/>
           <a:p>
-            <a:fld id="{50FA6BE1-DBAC-430D-AEFC-57052AB5715B}" type="datetime1">
+            <a:fld id="{9F5D9513-2AA5-4D4C-B8F9-64DB2729C6EC}" type="datetime1">
               <a:rPr lang="hu-HU" smtClean="0"/>
               <a:t>2026. 09. 18.</a:t>
             </a:fld>
@@ -4145,40 +4187,51 @@
           <a:bodyPr/>
           <a:lstStyle/>
           <a:p>
-            <a:endParaRPr lang="hu-HU" dirty="0"/>
-          </a:p>
-        </p:txBody>
-      </p:sp>
-      <p:sp>
-        <p:nvSpPr>
-          <p:cNvPr id="4" name="Tartalom helye 3">
-            <a:extLst>
-              <a:ext uri="{FF2B5EF4-FFF2-40B4-BE49-F238E27FC236}">
-                <a16:creationId xmlns:a16="http://schemas.microsoft.com/office/drawing/2014/main" id="{9F94AE88-75F2-46BD-95FD-D5FB987A5FB6}"/>
-              </a:ext>
-            </a:extLst>
-          </p:cNvPr>
-          <p:cNvSpPr>
-            <a:spLocks noGrp="1"/>
-          </p:cNvSpPr>
+            <a:r>
+              <a:rPr lang="hu-HU" dirty="0"/>
+              <a:t>Válasszon az alábbi opciókból:</a:t>
+            </a:r>
+          </a:p>
+        </p:txBody>
+      </p:sp>
+      <p:pic>
+        <p:nvPicPr>
+          <p:cNvPr id="10" name="Tartalom helye 9">
+            <a:extLst>
+              <a:ext uri="{FF2B5EF4-FFF2-40B4-BE49-F238E27FC236}">
+                <a16:creationId xmlns:a16="http://schemas.microsoft.com/office/drawing/2014/main" id="{DB65145B-0104-42CF-90D0-456CD0C3F688}"/>
+              </a:ext>
+            </a:extLst>
+          </p:cNvPr>
+          <p:cNvPicPr>
+            <a:picLocks noGrp="1" noChangeAspect="1"/>
+          </p:cNvPicPr>
           <p:nvPr>
             <p:ph sz="half" idx="2"/>
           </p:nvPr>
-        </p:nvSpPr>
+        </p:nvPicPr>
+        <p:blipFill>
+          <a:blip r:embed="rId2">
+            <a:extLst>
+              <a:ext uri="{28A0092B-C50C-407E-A947-70E740481C1C}">
+                <a14:useLocalDpi xmlns:a14="http://schemas.microsoft.com/office/drawing/2010/main" val="0"/>
+              </a:ext>
+            </a:extLst>
+          </a:blip>
+          <a:stretch>
+            <a:fillRect/>
+          </a:stretch>
+        </p:blipFill>
         <p:spPr>
           <a:xfrm>
-            <a:off x="1056744" y="3920064"/>
-            <a:ext cx="4878391" cy="2717801"/>
+            <a:off x="1000076" y="1053286"/>
+            <a:ext cx="10191848" cy="974483"/>
           </a:xfrm>
+          <a:prstGeom prst="flowChartAlternateProcess">
+            <a:avLst/>
+          </a:prstGeom>
         </p:spPr>
-        <p:txBody>
-          <a:bodyPr/>
-          <a:lstStyle/>
-          <a:p>
-            <a:endParaRPr lang="hu-HU"/>
-          </a:p>
-        </p:txBody>
-      </p:sp>
+      </p:pic>
       <p:sp>
         <p:nvSpPr>
           <p:cNvPr id="5" name="Szöveg helye 4">
@@ -4205,7 +4258,18 @@
           <a:bodyPr/>
           <a:lstStyle/>
           <a:p>
-            <a:endParaRPr lang="hu-HU"/>
+            <a:r>
+              <a:rPr lang="hu-HU" dirty="0"/>
+              <a:t>A főmenü kódja </a:t>
+            </a:r>
+            <a:r>
+              <a:rPr lang="hu-HU" dirty="0" err="1"/>
+              <a:t>pythonban</a:t>
+            </a:r>
+            <a:r>
+              <a:rPr lang="hu-HU" dirty="0"/>
+              <a:t>:</a:t>
+            </a:r>
           </a:p>
         </p:txBody>
       </p:sp>
@@ -4235,7 +4299,7 @@
           <a:bodyPr/>
           <a:lstStyle/>
           <a:p>
-            <a:endParaRPr lang="hu-HU"/>
+            <a:endParaRPr lang="hu-HU" dirty="0"/>
           </a:p>
         </p:txBody>
       </p:sp>
@@ -4289,10 +4353,193 @@
           <a:bodyPr/>
           <a:lstStyle/>
           <a:p>
-            <a:fld id="{782D7C24-1CB2-43C8-A138-F37A4967746C}" type="datetime1">
+            <a:fld id="{C908E92F-3248-458B-8907-199E10093CFD}" type="datetime1">
               <a:rPr lang="hu-HU" smtClean="0"/>
               <a:t>2026. 09. 18.</a:t>
             </a:fld>
+            <a:endParaRPr lang="hu-HU"/>
+          </a:p>
+        </p:txBody>
+      </p:sp>
+      <p:sp>
+        <p:nvSpPr>
+          <p:cNvPr id="12" name="Szövegdoboz 11">
+            <a:extLst>
+              <a:ext uri="{FF2B5EF4-FFF2-40B4-BE49-F238E27FC236}">
+                <a16:creationId xmlns:a16="http://schemas.microsoft.com/office/drawing/2014/main" id="{1ED06D21-BF9A-4FAE-A26C-24D47759FA66}"/>
+              </a:ext>
+            </a:extLst>
+          </p:cNvPr>
+          <p:cNvSpPr txBox="1"/>
+          <p:nvPr/>
+        </p:nvSpPr>
+        <p:spPr>
+          <a:xfrm>
+            <a:off x="2435107" y="1985960"/>
+            <a:ext cx="7321786" cy="369332"/>
+          </a:xfrm>
+          <a:prstGeom prst="rect">
+            <a:avLst/>
+          </a:prstGeom>
+          <a:noFill/>
+        </p:spPr>
+        <p:txBody>
+          <a:bodyPr wrap="square" rtlCol="0">
+            <a:spAutoFit/>
+          </a:bodyPr>
+          <a:lstStyle/>
+          <a:p>
+            <a:pPr algn="ctr"/>
+            <a:r>
+              <a:rPr lang="hu-HU" i="1" dirty="0">
+                <a:solidFill>
+                  <a:schemeClr val="bg1"/>
+                </a:solidFill>
+              </a:rPr>
+              <a:t>A főmenü kinézete a terminálban</a:t>
+            </a:r>
+          </a:p>
+        </p:txBody>
+      </p:sp>
+      <p:sp>
+        <p:nvSpPr>
+          <p:cNvPr id="13" name="Téglalap: lekerekített 12">
+            <a:extLst>
+              <a:ext uri="{FF2B5EF4-FFF2-40B4-BE49-F238E27FC236}">
+                <a16:creationId xmlns:a16="http://schemas.microsoft.com/office/drawing/2014/main" id="{F96EBE34-5E95-44CA-9326-2A7FF7E9AFAC}"/>
+              </a:ext>
+            </a:extLst>
+          </p:cNvPr>
+          <p:cNvSpPr/>
+          <p:nvPr/>
+        </p:nvSpPr>
+        <p:spPr>
+          <a:xfrm>
+            <a:off x="2083324" y="4380688"/>
+            <a:ext cx="2975591" cy="606091"/>
+          </a:xfrm>
+          <a:prstGeom prst="roundRect">
+            <a:avLst/>
+          </a:prstGeom>
+          <a:solidFill>
+            <a:srgbClr val="28C2FF"/>
+          </a:solidFill>
+          <a:ln w="38100"/>
+        </p:spPr>
+        <p:style>
+          <a:lnRef idx="2">
+            <a:schemeClr val="accent1">
+              <a:shade val="50000"/>
+            </a:schemeClr>
+          </a:lnRef>
+          <a:fillRef idx="1">
+            <a:schemeClr val="accent1"/>
+          </a:fillRef>
+          <a:effectRef idx="0">
+            <a:schemeClr val="accent1"/>
+          </a:effectRef>
+          <a:fontRef idx="minor">
+            <a:schemeClr val="lt1"/>
+          </a:fontRef>
+        </p:style>
+        <p:txBody>
+          <a:bodyPr rtlCol="0" anchor="ctr"/>
+          <a:lstStyle/>
+          <a:p>
+            <a:pPr algn="ctr"/>
+            <a:endParaRPr lang="hu-HU"/>
+          </a:p>
+        </p:txBody>
+      </p:sp>
+      <p:sp>
+        <p:nvSpPr>
+          <p:cNvPr id="15" name="Szövegdoboz 14">
+            <a:extLst>
+              <a:ext uri="{FF2B5EF4-FFF2-40B4-BE49-F238E27FC236}">
+                <a16:creationId xmlns:a16="http://schemas.microsoft.com/office/drawing/2014/main" id="{4EA83EA2-23BA-4E5C-901C-32E9173E3F18}"/>
+              </a:ext>
+            </a:extLst>
+          </p:cNvPr>
+          <p:cNvSpPr txBox="1"/>
+          <p:nvPr/>
+        </p:nvSpPr>
+        <p:spPr>
+          <a:xfrm>
+            <a:off x="2083324" y="4476260"/>
+            <a:ext cx="2975590" cy="369332"/>
+          </a:xfrm>
+          <a:prstGeom prst="rect">
+            <a:avLst/>
+          </a:prstGeom>
+          <a:noFill/>
+        </p:spPr>
+        <p:txBody>
+          <a:bodyPr wrap="square" rtlCol="0">
+            <a:spAutoFit/>
+          </a:bodyPr>
+          <a:lstStyle/>
+          <a:p>
+            <a:pPr algn="ctr"/>
+            <a:r>
+              <a:rPr lang="hu-HU" dirty="0">
+                <a:solidFill>
+                  <a:schemeClr val="bg1"/>
+                </a:solidFill>
+                <a:latin typeface="Calibri" panose="020F0502020204030204" pitchFamily="34" charset="0"/>
+                <a:ea typeface="Calibri" panose="020F0502020204030204" pitchFamily="34" charset="0"/>
+                <a:cs typeface="Calibri" panose="020F0502020204030204" pitchFamily="34" charset="0"/>
+              </a:rPr>
+              <a:t>Megyekód beírása</a:t>
+            </a:r>
+          </a:p>
+        </p:txBody>
+      </p:sp>
+      <p:sp>
+        <p:nvSpPr>
+          <p:cNvPr id="16" name="Téglalap: lekerekített 15">
+            <a:extLst>
+              <a:ext uri="{FF2B5EF4-FFF2-40B4-BE49-F238E27FC236}">
+                <a16:creationId xmlns:a16="http://schemas.microsoft.com/office/drawing/2014/main" id="{51EE8863-2CF0-4DA9-B776-1E6926C6CBD4}"/>
+              </a:ext>
+            </a:extLst>
+          </p:cNvPr>
+          <p:cNvSpPr/>
+          <p:nvPr/>
+        </p:nvSpPr>
+        <p:spPr>
+          <a:xfrm>
+            <a:off x="2083323" y="5430823"/>
+            <a:ext cx="2975591" cy="606091"/>
+          </a:xfrm>
+          <a:prstGeom prst="roundRect">
+            <a:avLst/>
+          </a:prstGeom>
+          <a:solidFill>
+            <a:srgbClr val="28C2FF"/>
+          </a:solidFill>
+          <a:ln w="38100"/>
+        </p:spPr>
+        <p:style>
+          <a:lnRef idx="2">
+            <a:schemeClr val="accent1">
+              <a:shade val="50000"/>
+            </a:schemeClr>
+          </a:lnRef>
+          <a:fillRef idx="1">
+            <a:schemeClr val="accent1"/>
+          </a:fillRef>
+          <a:effectRef idx="0">
+            <a:schemeClr val="accent1"/>
+          </a:effectRef>
+          <a:fontRef idx="minor">
+            <a:schemeClr val="lt1"/>
+          </a:fontRef>
+        </p:style>
+        <p:txBody>
+          <a:bodyPr rtlCol="0" anchor="ctr"/>
+          <a:lstStyle/>
+          <a:p>
+            <a:pPr algn="ctr"/>
             <a:endParaRPr lang="hu-HU"/>
           </a:p>
         </p:txBody>
@@ -4307,6 +4554,182 @@
   <p:clrMapOvr>
     <a:masterClrMapping/>
   </p:clrMapOvr>
+  <p:timing>
+    <p:tnLst>
+      <p:par>
+        <p:cTn id="1" dur="indefinite" restart="never" nodeType="tmRoot">
+          <p:childTnLst>
+            <p:seq concurrent="1" nextAc="seek">
+              <p:cTn id="2" dur="indefinite" nodeType="mainSeq">
+                <p:childTnLst>
+                  <p:par>
+                    <p:cTn id="3" fill="hold">
+                      <p:stCondLst>
+                        <p:cond delay="indefinite"/>
+                      </p:stCondLst>
+                      <p:childTnLst>
+                        <p:par>
+                          <p:cTn id="4" fill="hold">
+                            <p:stCondLst>
+                              <p:cond delay="0"/>
+                            </p:stCondLst>
+                            <p:childTnLst>
+                              <p:par>
+                                <p:cTn id="5" presetID="26" presetClass="emph" presetSubtype="0" fill="hold" grpId="0" nodeType="clickEffect">
+                                  <p:stCondLst>
+                                    <p:cond delay="0"/>
+                                  </p:stCondLst>
+                                  <p:childTnLst>
+                                    <p:animEffect transition="out" filter="fade">
+                                      <p:cBhvr>
+                                        <p:cTn id="6" dur="500" tmFilter="0, 0; .2, .5; .8, .5; 1, 0"/>
+                                        <p:tgtEl>
+                                          <p:spTgt spid="13"/>
+                                        </p:tgtEl>
+                                      </p:cBhvr>
+                                    </p:animEffect>
+                                    <p:animScale>
+                                      <p:cBhvr>
+                                        <p:cTn id="7" dur="250" autoRev="1" fill="hold"/>
+                                        <p:tgtEl>
+                                          <p:spTgt spid="13"/>
+                                        </p:tgtEl>
+                                      </p:cBhvr>
+                                      <p:by x="105000" y="105000"/>
+                                    </p:animScale>
+                                  </p:childTnLst>
+                                </p:cTn>
+                              </p:par>
+                              <p:par>
+                                <p:cTn id="8" presetID="26" presetClass="emph" presetSubtype="0" fill="hold" grpId="0" nodeType="withEffect">
+                                  <p:stCondLst>
+                                    <p:cond delay="0"/>
+                                  </p:stCondLst>
+                                  <p:childTnLst>
+                                    <p:animEffect transition="out" filter="fade">
+                                      <p:cBhvr>
+                                        <p:cTn id="9" dur="500" tmFilter="0, 0; .2, .5; .8, .5; 1, 0"/>
+                                        <p:tgtEl>
+                                          <p:spTgt spid="15"/>
+                                        </p:tgtEl>
+                                      </p:cBhvr>
+                                    </p:animEffect>
+                                    <p:animScale>
+                                      <p:cBhvr>
+                                        <p:cTn id="10" dur="250" autoRev="1" fill="hold"/>
+                                        <p:tgtEl>
+                                          <p:spTgt spid="15"/>
+                                        </p:tgtEl>
+                                      </p:cBhvr>
+                                      <p:by x="105000" y="105000"/>
+                                    </p:animScale>
+                                  </p:childTnLst>
+                                </p:cTn>
+                              </p:par>
+                            </p:childTnLst>
+                          </p:cTn>
+                        </p:par>
+                      </p:childTnLst>
+                    </p:cTn>
+                  </p:par>
+                  <p:par>
+                    <p:cTn id="11" fill="hold">
+                      <p:stCondLst>
+                        <p:cond delay="indefinite"/>
+                      </p:stCondLst>
+                      <p:childTnLst>
+                        <p:par>
+                          <p:cTn id="12" fill="hold">
+                            <p:stCondLst>
+                              <p:cond delay="0"/>
+                            </p:stCondLst>
+                            <p:childTnLst>
+                              <p:par>
+                                <p:cTn id="13" presetID="26" presetClass="emph" presetSubtype="0" fill="hold" grpId="1" nodeType="clickEffect">
+                                  <p:stCondLst>
+                                    <p:cond delay="0"/>
+                                  </p:stCondLst>
+                                  <p:childTnLst>
+                                    <p:animEffect transition="out" filter="fade">
+                                      <p:cBhvr>
+                                        <p:cTn id="14" dur="500" tmFilter="0, 0; .2, .5; .8, .5; 1, 0"/>
+                                        <p:tgtEl>
+                                          <p:spTgt spid="13"/>
+                                        </p:tgtEl>
+                                      </p:cBhvr>
+                                    </p:animEffect>
+                                    <p:animScale>
+                                      <p:cBhvr>
+                                        <p:cTn id="15" dur="250" autoRev="1" fill="hold"/>
+                                        <p:tgtEl>
+                                          <p:spTgt spid="13"/>
+                                        </p:tgtEl>
+                                      </p:cBhvr>
+                                      <p:by x="105000" y="105000"/>
+                                    </p:animScale>
+                                  </p:childTnLst>
+                                </p:cTn>
+                              </p:par>
+                              <p:par>
+                                <p:cTn id="16" presetID="26" presetClass="emph" presetSubtype="0" fill="hold" grpId="1" nodeType="withEffect">
+                                  <p:stCondLst>
+                                    <p:cond delay="0"/>
+                                  </p:stCondLst>
+                                  <p:childTnLst>
+                                    <p:animEffect transition="out" filter="fade">
+                                      <p:cBhvr>
+                                        <p:cTn id="17" dur="500" tmFilter="0, 0; .2, .5; .8, .5; 1, 0"/>
+                                        <p:tgtEl>
+                                          <p:spTgt spid="15"/>
+                                        </p:tgtEl>
+                                      </p:cBhvr>
+                                    </p:animEffect>
+                                    <p:animScale>
+                                      <p:cBhvr>
+                                        <p:cTn id="18" dur="250" autoRev="1" fill="hold"/>
+                                        <p:tgtEl>
+                                          <p:spTgt spid="15"/>
+                                        </p:tgtEl>
+                                      </p:cBhvr>
+                                      <p:by x="105000" y="105000"/>
+                                    </p:animScale>
+                                  </p:childTnLst>
+                                </p:cTn>
+                              </p:par>
+                            </p:childTnLst>
+                          </p:cTn>
+                        </p:par>
+                      </p:childTnLst>
+                    </p:cTn>
+                  </p:par>
+                </p:childTnLst>
+              </p:cTn>
+              <p:prevCondLst>
+                <p:cond evt="onPrev" delay="0">
+                  <p:tgtEl>
+                    <p:sldTgt/>
+                  </p:tgtEl>
+                </p:cond>
+              </p:prevCondLst>
+              <p:nextCondLst>
+                <p:cond evt="onNext" delay="0">
+                  <p:tgtEl>
+                    <p:sldTgt/>
+                  </p:tgtEl>
+                </p:cond>
+              </p:nextCondLst>
+            </p:seq>
+          </p:childTnLst>
+        </p:cTn>
+      </p:par>
+    </p:tnLst>
+    <p:bldLst>
+      <p:bldP spid="13" grpId="0" animBg="1"/>
+      <p:bldP spid="13" grpId="1" animBg="1"/>
+      <p:bldP spid="15" grpId="0"/>
+      <p:bldP spid="15" grpId="1"/>
+    </p:bldLst>
+  </p:timing>
 </p:sld>
 </file>
 

--- a/Népesség 2025 projekt.pptx
+++ b/Népesség 2025 projekt.pptx
@@ -5,11 +5,13 @@
     <p:sldMasterId id="2147483678" r:id="rId1"/>
   </p:sldMasterIdLst>
   <p:notesMasterIdLst>
-    <p:notesMasterId r:id="rId4"/>
+    <p:notesMasterId r:id="rId6"/>
   </p:notesMasterIdLst>
   <p:sldIdLst>
     <p:sldId id="256" r:id="rId2"/>
     <p:sldId id="257" r:id="rId3"/>
+    <p:sldId id="258" r:id="rId4"/>
+    <p:sldId id="259" r:id="rId5"/>
   </p:sldIdLst>
   <p:sldSz cx="12192000" cy="6858000"/>
   <p:notesSz cx="6858000" cy="9144000"/>
@@ -198,7 +200,7 @@
           <a:p>
             <a:fld id="{86B53350-FB04-4B5F-B5A5-3AE388242D97}" type="datetimeFigureOut">
               <a:rPr lang="hu-HU" smtClean="0"/>
-              <a:t>2026. 09. 18.</a:t>
+              <a:t>2026. 09. 20.</a:t>
             </a:fld>
             <a:endParaRPr lang="hu-HU"/>
           </a:p>
@@ -614,7 +616,7 @@
           <a:p>
             <a:fld id="{E1F56041-F78F-46FB-9DD9-5EEFE30E9918}" type="datetime1">
               <a:rPr lang="hu-HU" smtClean="0"/>
-              <a:t>2026. 09. 18.</a:t>
+              <a:t>2026. 09. 20.</a:t>
             </a:fld>
             <a:endParaRPr lang="hu-HU"/>
           </a:p>
@@ -822,7 +824,7 @@
           <a:p>
             <a:fld id="{1CB45633-A540-4BA4-9503-37AACDF1BF7B}" type="datetime1">
               <a:rPr lang="hu-HU" smtClean="0"/>
-              <a:t>2026. 09. 18.</a:t>
+              <a:t>2026. 09. 20.</a:t>
             </a:fld>
             <a:endParaRPr lang="hu-HU"/>
           </a:p>
@@ -1030,7 +1032,7 @@
           <a:p>
             <a:fld id="{47703415-C3F8-41AA-8696-66C196C56785}" type="datetime1">
               <a:rPr lang="hu-HU" smtClean="0"/>
-              <a:t>2026. 09. 18.</a:t>
+              <a:t>2026. 09. 20.</a:t>
             </a:fld>
             <a:endParaRPr lang="hu-HU"/>
           </a:p>
@@ -1228,7 +1230,7 @@
           <a:p>
             <a:fld id="{56682343-3180-46FB-B3C4-E2A140C8BC6B}" type="datetime1">
               <a:rPr lang="hu-HU" smtClean="0"/>
-              <a:t>2026. 09. 18.</a:t>
+              <a:t>2026. 09. 20.</a:t>
             </a:fld>
             <a:endParaRPr lang="hu-HU"/>
           </a:p>
@@ -1513,7 +1515,7 @@
           <a:p>
             <a:fld id="{1B049D67-91FC-47B5-88DE-434B7642A4E4}" type="datetime1">
               <a:rPr lang="hu-HU" smtClean="0"/>
-              <a:t>2026. 09. 18.</a:t>
+              <a:t>2026. 09. 20.</a:t>
             </a:fld>
             <a:endParaRPr lang="hu-HU"/>
           </a:p>
@@ -1788,7 +1790,7 @@
           <a:p>
             <a:fld id="{48C48760-715D-48F2-BD53-7504C96B2800}" type="datetime1">
               <a:rPr lang="hu-HU" smtClean="0"/>
-              <a:t>2026. 09. 18.</a:t>
+              <a:t>2026. 09. 20.</a:t>
             </a:fld>
             <a:endParaRPr lang="hu-HU"/>
           </a:p>
@@ -2215,7 +2217,7 @@
           <a:p>
             <a:fld id="{22A7F8D9-AF72-4E6A-9A90-15EB298345A2}" type="datetime1">
               <a:rPr lang="hu-HU" smtClean="0"/>
-              <a:t>2026. 09. 18.</a:t>
+              <a:t>2026. 09. 20.</a:t>
             </a:fld>
             <a:endParaRPr lang="hu-HU"/>
           </a:p>
@@ -2366,7 +2368,7 @@
           <a:p>
             <a:fld id="{E451E4E6-2A82-4E5D-BD47-87D6F8C650FB}" type="datetime1">
               <a:rPr lang="hu-HU" smtClean="0"/>
-              <a:t>2026. 09. 18.</a:t>
+              <a:t>2026. 09. 20.</a:t>
             </a:fld>
             <a:endParaRPr lang="hu-HU"/>
           </a:p>
@@ -2479,7 +2481,7 @@
           <a:p>
             <a:fld id="{C61FE8E8-BF58-4CDA-AF5C-5BEAA77F4788}" type="datetime1">
               <a:rPr lang="hu-HU" smtClean="0"/>
-              <a:t>2026. 09. 18.</a:t>
+              <a:t>2026. 09. 20.</a:t>
             </a:fld>
             <a:endParaRPr lang="hu-HU"/>
           </a:p>
@@ -2790,7 +2792,7 @@
           <a:p>
             <a:fld id="{39EDC4CA-614F-4B8D-BF7C-29228988EFC5}" type="datetime1">
               <a:rPr lang="hu-HU" smtClean="0"/>
-              <a:t>2026. 09. 18.</a:t>
+              <a:t>2026. 09. 20.</a:t>
             </a:fld>
             <a:endParaRPr lang="hu-HU"/>
           </a:p>
@@ -3078,7 +3080,7 @@
           <a:p>
             <a:fld id="{3B86B231-57CE-4A89-85CD-A03E237611E0}" type="datetime1">
               <a:rPr lang="hu-HU" smtClean="0"/>
-              <a:t>2026. 09. 18.</a:t>
+              <a:t>2026. 09. 20.</a:t>
             </a:fld>
             <a:endParaRPr lang="hu-HU"/>
           </a:p>
@@ -3338,7 +3340,7 @@
           <a:p>
             <a:fld id="{79FE6BD6-CDEC-46C5-9AC8-9B5089C429BC}" type="datetime1">
               <a:rPr lang="hu-HU" smtClean="0"/>
-              <a:t>2026. 09. 18.</a:t>
+              <a:t>2026. 09. 20.</a:t>
             </a:fld>
             <a:endParaRPr lang="hu-HU" dirty="0"/>
           </a:p>
@@ -4061,7 +4063,7 @@
           <a:p>
             <a:fld id="{9F5D9513-2AA5-4D4C-B8F9-64DB2729C6EC}" type="datetime1">
               <a:rPr lang="hu-HU" smtClean="0"/>
-              <a:t>2026. 09. 18.</a:t>
+              <a:t>2026. 09. 20.</a:t>
             </a:fld>
             <a:endParaRPr lang="hu-HU"/>
           </a:p>
@@ -4179,7 +4181,7 @@
         </p:nvSpPr>
         <p:spPr>
           <a:xfrm>
-            <a:off x="1285353" y="3096153"/>
+            <a:off x="1056173" y="2164807"/>
             <a:ext cx="4649783" cy="823912"/>
           </a:xfrm>
         </p:spPr>
@@ -4234,77 +4236,6 @@
       </p:pic>
       <p:sp>
         <p:nvSpPr>
-          <p:cNvPr id="5" name="Szöveg helye 4">
-            <a:extLst>
-              <a:ext uri="{FF2B5EF4-FFF2-40B4-BE49-F238E27FC236}">
-                <a16:creationId xmlns:a16="http://schemas.microsoft.com/office/drawing/2014/main" id="{11D34A4F-9E61-499F-8417-86DCFA565FE9}"/>
-              </a:ext>
-            </a:extLst>
-          </p:cNvPr>
-          <p:cNvSpPr>
-            <a:spLocks noGrp="1"/>
-          </p:cNvSpPr>
-          <p:nvPr>
-            <p:ph type="body" sz="quarter" idx="3"/>
-          </p:nvPr>
-        </p:nvSpPr>
-        <p:spPr>
-          <a:xfrm>
-            <a:off x="6316142" y="3096152"/>
-            <a:ext cx="4646602" cy="823912"/>
-          </a:xfrm>
-        </p:spPr>
-        <p:txBody>
-          <a:bodyPr/>
-          <a:lstStyle/>
-          <a:p>
-            <a:r>
-              <a:rPr lang="hu-HU" dirty="0"/>
-              <a:t>A főmenü kódja </a:t>
-            </a:r>
-            <a:r>
-              <a:rPr lang="hu-HU" dirty="0" err="1"/>
-              <a:t>pythonban</a:t>
-            </a:r>
-            <a:r>
-              <a:rPr lang="hu-HU" dirty="0"/>
-              <a:t>:</a:t>
-            </a:r>
-          </a:p>
-        </p:txBody>
-      </p:sp>
-      <p:sp>
-        <p:nvSpPr>
-          <p:cNvPr id="6" name="Tartalom helye 5">
-            <a:extLst>
-              <a:ext uri="{FF2B5EF4-FFF2-40B4-BE49-F238E27FC236}">
-                <a16:creationId xmlns:a16="http://schemas.microsoft.com/office/drawing/2014/main" id="{9F444125-A1DD-4FCE-9FD1-B401B384E753}"/>
-              </a:ext>
-            </a:extLst>
-          </p:cNvPr>
-          <p:cNvSpPr>
-            <a:spLocks noGrp="1"/>
-          </p:cNvSpPr>
-          <p:nvPr>
-            <p:ph sz="quarter" idx="4"/>
-          </p:nvPr>
-        </p:nvSpPr>
-        <p:spPr>
-          <a:xfrm>
-            <a:off x="6087534" y="3920064"/>
-            <a:ext cx="4875210" cy="2717801"/>
-          </a:xfrm>
-        </p:spPr>
-        <p:txBody>
-          <a:bodyPr/>
-          <a:lstStyle/>
-          <a:p>
-            <a:endParaRPr lang="hu-HU" dirty="0"/>
-          </a:p>
-        </p:txBody>
-      </p:sp>
-      <p:sp>
-        <p:nvSpPr>
           <p:cNvPr id="7" name="Dia számának helye 6">
             <a:extLst>
               <a:ext uri="{FF2B5EF4-FFF2-40B4-BE49-F238E27FC236}">
@@ -4355,7 +4286,7 @@
           <a:p>
             <a:fld id="{C908E92F-3248-458B-8907-199E10093CFD}" type="datetime1">
               <a:rPr lang="hu-HU" smtClean="0"/>
-              <a:t>2026. 09. 18.</a:t>
+              <a:t>2026. 09. 20.</a:t>
             </a:fld>
             <a:endParaRPr lang="hu-HU"/>
           </a:p>
@@ -4404,6 +4335,7 @@
       <p:sp>
         <p:nvSpPr>
           <p:cNvPr id="13" name="Téglalap: lekerekített 12">
+            <a:hlinkClick r:id="rId3" action="ppaction://hlinksldjump"/>
             <a:extLst>
               <a:ext uri="{FF2B5EF4-FFF2-40B4-BE49-F238E27FC236}">
                 <a16:creationId xmlns:a16="http://schemas.microsoft.com/office/drawing/2014/main" id="{F96EBE34-5E95-44CA-9326-2A7FF7E9AFAC}"/>
@@ -4415,7 +4347,7 @@
         </p:nvSpPr>
         <p:spPr>
           <a:xfrm>
-            <a:off x="2083324" y="4380688"/>
+            <a:off x="1854144" y="3449342"/>
             <a:ext cx="2975591" cy="606091"/>
           </a:xfrm>
           <a:prstGeom prst="roundRect">
@@ -4454,6 +4386,7 @@
       <p:sp>
         <p:nvSpPr>
           <p:cNvPr id="15" name="Szövegdoboz 14">
+            <a:hlinkClick r:id="rId3" action="ppaction://hlinksldjump"/>
             <a:extLst>
               <a:ext uri="{FF2B5EF4-FFF2-40B4-BE49-F238E27FC236}">
                 <a16:creationId xmlns:a16="http://schemas.microsoft.com/office/drawing/2014/main" id="{4EA83EA2-23BA-4E5C-901C-32E9173E3F18}"/>
@@ -4465,7 +4398,7 @@
         </p:nvSpPr>
         <p:spPr>
           <a:xfrm>
-            <a:off x="2083324" y="4476260"/>
+            <a:off x="1854144" y="3544914"/>
             <a:ext cx="2975590" cy="369332"/>
           </a:xfrm>
           <a:prstGeom prst="rect">
@@ -4496,10 +4429,11 @@
       </p:sp>
       <p:sp>
         <p:nvSpPr>
-          <p:cNvPr id="16" name="Téglalap: lekerekített 15">
-            <a:extLst>
-              <a:ext uri="{FF2B5EF4-FFF2-40B4-BE49-F238E27FC236}">
-                <a16:creationId xmlns:a16="http://schemas.microsoft.com/office/drawing/2014/main" id="{51EE8863-2CF0-4DA9-B776-1E6926C6CBD4}"/>
+          <p:cNvPr id="14" name="Téglalap: lekerekített 13">
+            <a:hlinkClick r:id="rId4" action="ppaction://hlinksldjump"/>
+            <a:extLst>
+              <a:ext uri="{FF2B5EF4-FFF2-40B4-BE49-F238E27FC236}">
+                <a16:creationId xmlns:a16="http://schemas.microsoft.com/office/drawing/2014/main" id="{3E374164-581D-24B0-29EC-3AE025F13E4C}"/>
               </a:ext>
             </a:extLst>
           </p:cNvPr>
@@ -4508,7 +4442,7 @@
         </p:nvSpPr>
         <p:spPr>
           <a:xfrm>
-            <a:off x="2083323" y="5430823"/>
+            <a:off x="1854144" y="4509097"/>
             <a:ext cx="2975591" cy="606091"/>
           </a:xfrm>
           <a:prstGeom prst="roundRect">
@@ -4544,6 +4478,109 @@
           </a:p>
         </p:txBody>
       </p:sp>
+      <p:sp>
+        <p:nvSpPr>
+          <p:cNvPr id="17" name="Szövegdoboz 16">
+            <a:hlinkClick r:id="rId4" action="ppaction://hlinksldjump"/>
+            <a:extLst>
+              <a:ext uri="{FF2B5EF4-FFF2-40B4-BE49-F238E27FC236}">
+                <a16:creationId xmlns:a16="http://schemas.microsoft.com/office/drawing/2014/main" id="{A6AEE4FA-BB21-8BF7-4071-B1DAE4055048}"/>
+              </a:ext>
+            </a:extLst>
+          </p:cNvPr>
+          <p:cNvSpPr txBox="1"/>
+          <p:nvPr/>
+        </p:nvSpPr>
+        <p:spPr>
+          <a:xfrm>
+            <a:off x="1854144" y="4604669"/>
+            <a:ext cx="2975590" cy="369332"/>
+          </a:xfrm>
+          <a:prstGeom prst="rect">
+            <a:avLst/>
+          </a:prstGeom>
+          <a:noFill/>
+        </p:spPr>
+        <p:txBody>
+          <a:bodyPr wrap="square" rtlCol="0">
+            <a:spAutoFit/>
+          </a:bodyPr>
+          <a:lstStyle/>
+          <a:p>
+            <a:pPr algn="ctr"/>
+            <a:r>
+              <a:rPr lang="hu-HU" dirty="0">
+                <a:solidFill>
+                  <a:schemeClr val="bg1"/>
+                </a:solidFill>
+                <a:latin typeface="Calibri" panose="020F0502020204030204" pitchFamily="34" charset="0"/>
+                <a:ea typeface="Calibri" panose="020F0502020204030204" pitchFamily="34" charset="0"/>
+                <a:cs typeface="Calibri" panose="020F0502020204030204" pitchFamily="34" charset="0"/>
+              </a:rPr>
+              <a:t>Település típusai</a:t>
+            </a:r>
+          </a:p>
+        </p:txBody>
+      </p:sp>
+      <p:sp>
+        <p:nvSpPr>
+          <p:cNvPr id="19" name="Tartalom helye 18">
+            <a:extLst>
+              <a:ext uri="{FF2B5EF4-FFF2-40B4-BE49-F238E27FC236}">
+                <a16:creationId xmlns:a16="http://schemas.microsoft.com/office/drawing/2014/main" id="{044C93E6-796F-75C0-7ADD-D742DBCCF136}"/>
+              </a:ext>
+            </a:extLst>
+          </p:cNvPr>
+          <p:cNvSpPr>
+            <a:spLocks noGrp="1"/>
+          </p:cNvSpPr>
+          <p:nvPr>
+            <p:ph sz="quarter" idx="4"/>
+          </p:nvPr>
+        </p:nvSpPr>
+        <p:spPr/>
+        <p:txBody>
+          <a:bodyPr/>
+          <a:lstStyle/>
+          <a:p>
+            <a:r>
+              <a:rPr lang="hu-HU" dirty="0"/>
+              <a:t>A főmenü üdvözli a felhasználót majd megkéri hogy válasszon az </a:t>
+            </a:r>
+            <a:r>
+              <a:rPr lang="hu-HU" dirty="0" err="1"/>
+              <a:t>opcióknól</a:t>
+            </a:r>
+            <a:r>
+              <a:rPr lang="hu-HU" dirty="0"/>
+              <a:t> valamint a programból való kilépés lehetőségét is feldobja. </a:t>
+            </a:r>
+          </a:p>
+          <a:p>
+            <a:r>
+              <a:rPr lang="hu-HU" dirty="0"/>
+              <a:t>Az opció kiválasztása után nem kell ENTER-t ütni köszönhetően az </a:t>
+            </a:r>
+            <a:r>
+              <a:rPr lang="hu-HU" dirty="0" err="1"/>
+              <a:t>msvcrt.getch</a:t>
+            </a:r>
+            <a:r>
+              <a:rPr lang="hu-HU" dirty="0"/>
+              <a:t>() és .</a:t>
+            </a:r>
+            <a:r>
+              <a:rPr lang="hu-HU" dirty="0" err="1"/>
+              <a:t>kbhit</a:t>
+            </a:r>
+            <a:r>
+              <a:rPr lang="hu-HU" dirty="0"/>
+              <a:t>() funkciónak</a:t>
+            </a:r>
+            <a:endParaRPr lang="en-US" dirty="0"/>
+          </a:p>
+        </p:txBody>
+      </p:sp>
     </p:spTree>
     <p:extLst>
       <p:ext uri="{BB962C8B-B14F-4D97-AF65-F5344CB8AC3E}">
@@ -4554,6 +4591,18 @@
   <p:clrMapOvr>
     <a:masterClrMapping/>
   </p:clrMapOvr>
+  <mc:AlternateContent xmlns:mc="http://schemas.openxmlformats.org/markup-compatibility/2006">
+    <mc:Choice xmlns:p15="http://schemas.microsoft.com/office/powerpoint/2012/main" Requires="p15">
+      <p:transition xmlns:p14="http://schemas.microsoft.com/office/powerpoint/2010/main" spd="slow" p14:dur="1250">
+        <p15:prstTrans prst="peelOff"/>
+      </p:transition>
+    </mc:Choice>
+    <mc:Fallback>
+      <p:transition spd="slow">
+        <p:fade/>
+      </p:transition>
+    </mc:Fallback>
+  </mc:AlternateContent>
   <p:timing>
     <p:tnLst>
       <p:par>
@@ -4566,6 +4615,9 @@
                     <p:cTn id="3" fill="hold">
                       <p:stCondLst>
                         <p:cond delay="indefinite"/>
+                        <p:cond evt="onBegin" delay="0">
+                          <p:tn val="2"/>
+                        </p:cond>
                       </p:stCondLst>
                       <p:childTnLst>
                         <p:par>
@@ -4575,124 +4627,338 @@
                             </p:stCondLst>
                             <p:childTnLst>
                               <p:par>
-                                <p:cTn id="5" presetID="26" presetClass="emph" presetSubtype="0" fill="hold" grpId="0" nodeType="clickEffect">
+                                <p:cTn id="5" presetID="32" presetClass="emph" presetSubtype="0" repeatCount="indefinite" fill="hold" grpId="0" nodeType="afterEffect">
                                   <p:stCondLst>
                                     <p:cond delay="0"/>
                                   </p:stCondLst>
                                   <p:childTnLst>
-                                    <p:animEffect transition="out" filter="fade">
+                                    <p:animRot by="120000">
                                       <p:cBhvr>
-                                        <p:cTn id="6" dur="500" tmFilter="0, 0; .2, .5; .8, .5; 1, 0"/>
+                                        <p:cTn id="6" dur="100" fill="hold">
+                                          <p:stCondLst>
+                                            <p:cond delay="0"/>
+                                          </p:stCondLst>
+                                        </p:cTn>
                                         <p:tgtEl>
                                           <p:spTgt spid="13"/>
                                         </p:tgtEl>
+                                        <p:attrNameLst>
+                                          <p:attrName>r</p:attrName>
+                                        </p:attrNameLst>
                                       </p:cBhvr>
-                                    </p:animEffect>
-                                    <p:animScale>
+                                    </p:animRot>
+                                    <p:animRot by="-240000">
                                       <p:cBhvr>
-                                        <p:cTn id="7" dur="250" autoRev="1" fill="hold"/>
+                                        <p:cTn id="7" dur="200" fill="hold">
+                                          <p:stCondLst>
+                                            <p:cond delay="200"/>
+                                          </p:stCondLst>
+                                        </p:cTn>
                                         <p:tgtEl>
                                           <p:spTgt spid="13"/>
                                         </p:tgtEl>
+                                        <p:attrNameLst>
+                                          <p:attrName>r</p:attrName>
+                                        </p:attrNameLst>
                                       </p:cBhvr>
-                                      <p:by x="105000" y="105000"/>
-                                    </p:animScale>
+                                    </p:animRot>
+                                    <p:animRot by="240000">
+                                      <p:cBhvr>
+                                        <p:cTn id="8" dur="200" fill="hold">
+                                          <p:stCondLst>
+                                            <p:cond delay="400"/>
+                                          </p:stCondLst>
+                                        </p:cTn>
+                                        <p:tgtEl>
+                                          <p:spTgt spid="13"/>
+                                        </p:tgtEl>
+                                        <p:attrNameLst>
+                                          <p:attrName>r</p:attrName>
+                                        </p:attrNameLst>
+                                      </p:cBhvr>
+                                    </p:animRot>
+                                    <p:animRot by="-240000">
+                                      <p:cBhvr>
+                                        <p:cTn id="9" dur="200" fill="hold">
+                                          <p:stCondLst>
+                                            <p:cond delay="600"/>
+                                          </p:stCondLst>
+                                        </p:cTn>
+                                        <p:tgtEl>
+                                          <p:spTgt spid="13"/>
+                                        </p:tgtEl>
+                                        <p:attrNameLst>
+                                          <p:attrName>r</p:attrName>
+                                        </p:attrNameLst>
+                                      </p:cBhvr>
+                                    </p:animRot>
+                                    <p:animRot by="120000">
+                                      <p:cBhvr>
+                                        <p:cTn id="10" dur="200" fill="hold">
+                                          <p:stCondLst>
+                                            <p:cond delay="800"/>
+                                          </p:stCondLst>
+                                        </p:cTn>
+                                        <p:tgtEl>
+                                          <p:spTgt spid="13"/>
+                                        </p:tgtEl>
+                                        <p:attrNameLst>
+                                          <p:attrName>r</p:attrName>
+                                        </p:attrNameLst>
+                                      </p:cBhvr>
+                                    </p:animRot>
                                   </p:childTnLst>
                                 </p:cTn>
                               </p:par>
                               <p:par>
-                                <p:cTn id="8" presetID="26" presetClass="emph" presetSubtype="0" fill="hold" grpId="0" nodeType="withEffect">
+                                <p:cTn id="11" presetID="32" presetClass="emph" presetSubtype="0" repeatCount="indefinite" fill="hold" grpId="0" nodeType="withEffect">
                                   <p:stCondLst>
                                     <p:cond delay="0"/>
                                   </p:stCondLst>
                                   <p:childTnLst>
-                                    <p:animEffect transition="out" filter="fade">
+                                    <p:animRot by="120000">
                                       <p:cBhvr>
-                                        <p:cTn id="9" dur="500" tmFilter="0, 0; .2, .5; .8, .5; 1, 0"/>
+                                        <p:cTn id="12" dur="100" fill="hold">
+                                          <p:stCondLst>
+                                            <p:cond delay="0"/>
+                                          </p:stCondLst>
+                                        </p:cTn>
                                         <p:tgtEl>
-                                          <p:spTgt spid="15"/>
+                                          <p:spTgt spid="14"/>
                                         </p:tgtEl>
+                                        <p:attrNameLst>
+                                          <p:attrName>r</p:attrName>
+                                        </p:attrNameLst>
                                       </p:cBhvr>
-                                    </p:animEffect>
-                                    <p:animScale>
+                                    </p:animRot>
+                                    <p:animRot by="-240000">
                                       <p:cBhvr>
-                                        <p:cTn id="10" dur="250" autoRev="1" fill="hold"/>
+                                        <p:cTn id="13" dur="200" fill="hold">
+                                          <p:stCondLst>
+                                            <p:cond delay="200"/>
+                                          </p:stCondLst>
+                                        </p:cTn>
                                         <p:tgtEl>
-                                          <p:spTgt spid="15"/>
+                                          <p:spTgt spid="14"/>
                                         </p:tgtEl>
+                                        <p:attrNameLst>
+                                          <p:attrName>r</p:attrName>
+                                        </p:attrNameLst>
                                       </p:cBhvr>
-                                      <p:by x="105000" y="105000"/>
-                                    </p:animScale>
+                                    </p:animRot>
+                                    <p:animRot by="240000">
+                                      <p:cBhvr>
+                                        <p:cTn id="14" dur="200" fill="hold">
+                                          <p:stCondLst>
+                                            <p:cond delay="400"/>
+                                          </p:stCondLst>
+                                        </p:cTn>
+                                        <p:tgtEl>
+                                          <p:spTgt spid="14"/>
+                                        </p:tgtEl>
+                                        <p:attrNameLst>
+                                          <p:attrName>r</p:attrName>
+                                        </p:attrNameLst>
+                                      </p:cBhvr>
+                                    </p:animRot>
+                                    <p:animRot by="-240000">
+                                      <p:cBhvr>
+                                        <p:cTn id="15" dur="200" fill="hold">
+                                          <p:stCondLst>
+                                            <p:cond delay="600"/>
+                                          </p:stCondLst>
+                                        </p:cTn>
+                                        <p:tgtEl>
+                                          <p:spTgt spid="14"/>
+                                        </p:tgtEl>
+                                        <p:attrNameLst>
+                                          <p:attrName>r</p:attrName>
+                                        </p:attrNameLst>
+                                      </p:cBhvr>
+                                    </p:animRot>
+                                    <p:animRot by="120000">
+                                      <p:cBhvr>
+                                        <p:cTn id="16" dur="200" fill="hold">
+                                          <p:stCondLst>
+                                            <p:cond delay="800"/>
+                                          </p:stCondLst>
+                                        </p:cTn>
+                                        <p:tgtEl>
+                                          <p:spTgt spid="14"/>
+                                        </p:tgtEl>
+                                        <p:attrNameLst>
+                                          <p:attrName>r</p:attrName>
+                                        </p:attrNameLst>
+                                      </p:cBhvr>
+                                    </p:animRot>
                                   </p:childTnLst>
                                 </p:cTn>
                               </p:par>
-                            </p:childTnLst>
-                          </p:cTn>
-                        </p:par>
-                      </p:childTnLst>
-                    </p:cTn>
-                  </p:par>
-                  <p:par>
-                    <p:cTn id="11" fill="hold">
-                      <p:stCondLst>
-                        <p:cond delay="indefinite"/>
-                      </p:stCondLst>
-                      <p:childTnLst>
-                        <p:par>
-                          <p:cTn id="12" fill="hold">
-                            <p:stCondLst>
-                              <p:cond delay="0"/>
-                            </p:stCondLst>
-                            <p:childTnLst>
                               <p:par>
-                                <p:cTn id="13" presetID="26" presetClass="emph" presetSubtype="0" fill="hold" grpId="1" nodeType="clickEffect">
+                                <p:cTn id="17" presetID="32" presetClass="emph" presetSubtype="0" repeatCount="indefinite" fill="hold" grpId="0" nodeType="withEffect">
                                   <p:stCondLst>
                                     <p:cond delay="0"/>
                                   </p:stCondLst>
                                   <p:childTnLst>
-                                    <p:animEffect transition="out" filter="fade">
+                                    <p:animRot by="120000">
                                       <p:cBhvr>
-                                        <p:cTn id="14" dur="500" tmFilter="0, 0; .2, .5; .8, .5; 1, 0"/>
+                                        <p:cTn id="18" dur="100" fill="hold">
+                                          <p:stCondLst>
+                                            <p:cond delay="0"/>
+                                          </p:stCondLst>
+                                        </p:cTn>
                                         <p:tgtEl>
-                                          <p:spTgt spid="13"/>
+                                          <p:spTgt spid="15"/>
                                         </p:tgtEl>
+                                        <p:attrNameLst>
+                                          <p:attrName>r</p:attrName>
+                                        </p:attrNameLst>
                                       </p:cBhvr>
-                                    </p:animEffect>
-                                    <p:animScale>
+                                    </p:animRot>
+                                    <p:animRot by="-240000">
                                       <p:cBhvr>
-                                        <p:cTn id="15" dur="250" autoRev="1" fill="hold"/>
+                                        <p:cTn id="19" dur="200" fill="hold">
+                                          <p:stCondLst>
+                                            <p:cond delay="200"/>
+                                          </p:stCondLst>
+                                        </p:cTn>
                                         <p:tgtEl>
-                                          <p:spTgt spid="13"/>
+                                          <p:spTgt spid="15"/>
                                         </p:tgtEl>
+                                        <p:attrNameLst>
+                                          <p:attrName>r</p:attrName>
+                                        </p:attrNameLst>
                                       </p:cBhvr>
-                                      <p:by x="105000" y="105000"/>
-                                    </p:animScale>
+                                    </p:animRot>
+                                    <p:animRot by="240000">
+                                      <p:cBhvr>
+                                        <p:cTn id="20" dur="200" fill="hold">
+                                          <p:stCondLst>
+                                            <p:cond delay="400"/>
+                                          </p:stCondLst>
+                                        </p:cTn>
+                                        <p:tgtEl>
+                                          <p:spTgt spid="15"/>
+                                        </p:tgtEl>
+                                        <p:attrNameLst>
+                                          <p:attrName>r</p:attrName>
+                                        </p:attrNameLst>
+                                      </p:cBhvr>
+                                    </p:animRot>
+                                    <p:animRot by="-240000">
+                                      <p:cBhvr>
+                                        <p:cTn id="21" dur="200" fill="hold">
+                                          <p:stCondLst>
+                                            <p:cond delay="600"/>
+                                          </p:stCondLst>
+                                        </p:cTn>
+                                        <p:tgtEl>
+                                          <p:spTgt spid="15"/>
+                                        </p:tgtEl>
+                                        <p:attrNameLst>
+                                          <p:attrName>r</p:attrName>
+                                        </p:attrNameLst>
+                                      </p:cBhvr>
+                                    </p:animRot>
+                                    <p:animRot by="120000">
+                                      <p:cBhvr>
+                                        <p:cTn id="22" dur="200" fill="hold">
+                                          <p:stCondLst>
+                                            <p:cond delay="800"/>
+                                          </p:stCondLst>
+                                        </p:cTn>
+                                        <p:tgtEl>
+                                          <p:spTgt spid="15"/>
+                                        </p:tgtEl>
+                                        <p:attrNameLst>
+                                          <p:attrName>r</p:attrName>
+                                        </p:attrNameLst>
+                                      </p:cBhvr>
+                                    </p:animRot>
                                   </p:childTnLst>
                                 </p:cTn>
                               </p:par>
                               <p:par>
-                                <p:cTn id="16" presetID="26" presetClass="emph" presetSubtype="0" fill="hold" grpId="1" nodeType="withEffect">
+                                <p:cTn id="23" presetID="32" presetClass="emph" presetSubtype="0" repeatCount="indefinite" fill="hold" grpId="0" nodeType="withEffect">
                                   <p:stCondLst>
                                     <p:cond delay="0"/>
                                   </p:stCondLst>
                                   <p:childTnLst>
-                                    <p:animEffect transition="out" filter="fade">
+                                    <p:animRot by="120000">
                                       <p:cBhvr>
-                                        <p:cTn id="17" dur="500" tmFilter="0, 0; .2, .5; .8, .5; 1, 0"/>
+                                        <p:cTn id="24" dur="100" fill="hold">
+                                          <p:stCondLst>
+                                            <p:cond delay="0"/>
+                                          </p:stCondLst>
+                                        </p:cTn>
                                         <p:tgtEl>
-                                          <p:spTgt spid="15"/>
+                                          <p:spTgt spid="17"/>
                                         </p:tgtEl>
+                                        <p:attrNameLst>
+                                          <p:attrName>r</p:attrName>
+                                        </p:attrNameLst>
                                       </p:cBhvr>
-                                    </p:animEffect>
-                                    <p:animScale>
+                                    </p:animRot>
+                                    <p:animRot by="-240000">
                                       <p:cBhvr>
-                                        <p:cTn id="18" dur="250" autoRev="1" fill="hold"/>
+                                        <p:cTn id="25" dur="200" fill="hold">
+                                          <p:stCondLst>
+                                            <p:cond delay="200"/>
+                                          </p:stCondLst>
+                                        </p:cTn>
                                         <p:tgtEl>
-                                          <p:spTgt spid="15"/>
+                                          <p:spTgt spid="17"/>
                                         </p:tgtEl>
+                                        <p:attrNameLst>
+                                          <p:attrName>r</p:attrName>
+                                        </p:attrNameLst>
                                       </p:cBhvr>
-                                      <p:by x="105000" y="105000"/>
-                                    </p:animScale>
+                                    </p:animRot>
+                                    <p:animRot by="240000">
+                                      <p:cBhvr>
+                                        <p:cTn id="26" dur="200" fill="hold">
+                                          <p:stCondLst>
+                                            <p:cond delay="400"/>
+                                          </p:stCondLst>
+                                        </p:cTn>
+                                        <p:tgtEl>
+                                          <p:spTgt spid="17"/>
+                                        </p:tgtEl>
+                                        <p:attrNameLst>
+                                          <p:attrName>r</p:attrName>
+                                        </p:attrNameLst>
+                                      </p:cBhvr>
+                                    </p:animRot>
+                                    <p:animRot by="-240000">
+                                      <p:cBhvr>
+                                        <p:cTn id="27" dur="200" fill="hold">
+                                          <p:stCondLst>
+                                            <p:cond delay="600"/>
+                                          </p:stCondLst>
+                                        </p:cTn>
+                                        <p:tgtEl>
+                                          <p:spTgt spid="17"/>
+                                        </p:tgtEl>
+                                        <p:attrNameLst>
+                                          <p:attrName>r</p:attrName>
+                                        </p:attrNameLst>
+                                      </p:cBhvr>
+                                    </p:animRot>
+                                    <p:animRot by="120000">
+                                      <p:cBhvr>
+                                        <p:cTn id="28" dur="200" fill="hold">
+                                          <p:stCondLst>
+                                            <p:cond delay="800"/>
+                                          </p:stCondLst>
+                                        </p:cTn>
+                                        <p:tgtEl>
+                                          <p:spTgt spid="17"/>
+                                        </p:tgtEl>
+                                        <p:attrNameLst>
+                                          <p:attrName>r</p:attrName>
+                                        </p:attrNameLst>
+                                      </p:cBhvr>
+                                    </p:animRot>
                                   </p:childTnLst>
                                 </p:cTn>
                               </p:par>
@@ -4725,11 +4991,633 @@
     </p:tnLst>
     <p:bldLst>
       <p:bldP spid="13" grpId="0" animBg="1"/>
-      <p:bldP spid="13" grpId="1" animBg="1"/>
       <p:bldP spid="15" grpId="0"/>
-      <p:bldP spid="15" grpId="1"/>
+      <p:bldP spid="14" grpId="0" animBg="1"/>
+      <p:bldP spid="17" grpId="0"/>
     </p:bldLst>
   </p:timing>
+</p:sld>
+</file>
+
+<file path=ppt/slides/slide3.xml><?xml version="1.0" encoding="utf-8"?>
+<p:sld xmlns:a="http://schemas.openxmlformats.org/drawingml/2006/main" xmlns:r="http://schemas.openxmlformats.org/officeDocument/2006/relationships" xmlns:p="http://schemas.openxmlformats.org/presentationml/2006/main">
+  <p:cSld>
+    <p:spTree>
+      <p:nvGrpSpPr>
+        <p:cNvPr id="1" name=""/>
+        <p:cNvGrpSpPr/>
+        <p:nvPr/>
+      </p:nvGrpSpPr>
+      <p:grpSpPr>
+        <a:xfrm>
+          <a:off x="0" y="0"/>
+          <a:ext cx="0" cy="0"/>
+          <a:chOff x="0" y="0"/>
+          <a:chExt cx="0" cy="0"/>
+        </a:xfrm>
+      </p:grpSpPr>
+      <p:sp>
+        <p:nvSpPr>
+          <p:cNvPr id="2" name="Cím 1">
+            <a:extLst>
+              <a:ext uri="{FF2B5EF4-FFF2-40B4-BE49-F238E27FC236}">
+                <a16:creationId xmlns:a16="http://schemas.microsoft.com/office/drawing/2014/main" id="{B6BE4797-6E61-E016-0CC5-599C6C602C9A}"/>
+              </a:ext>
+            </a:extLst>
+          </p:cNvPr>
+          <p:cNvSpPr>
+            <a:spLocks noGrp="1"/>
+          </p:cNvSpPr>
+          <p:nvPr>
+            <p:ph type="title"/>
+          </p:nvPr>
+        </p:nvSpPr>
+        <p:spPr/>
+        <p:txBody>
+          <a:bodyPr/>
+          <a:lstStyle/>
+          <a:p>
+            <a:r>
+              <a:rPr lang="hu-HU" dirty="0"/>
+              <a:t>Megyekód beírása</a:t>
+            </a:r>
+            <a:endParaRPr lang="en-US" dirty="0"/>
+          </a:p>
+        </p:txBody>
+      </p:sp>
+      <p:sp>
+        <p:nvSpPr>
+          <p:cNvPr id="3" name="Tartalom helye 2">
+            <a:extLst>
+              <a:ext uri="{FF2B5EF4-FFF2-40B4-BE49-F238E27FC236}">
+                <a16:creationId xmlns:a16="http://schemas.microsoft.com/office/drawing/2014/main" id="{DDB227FF-D3E3-FB39-D8E6-AE364ADB7641}"/>
+              </a:ext>
+            </a:extLst>
+          </p:cNvPr>
+          <p:cNvSpPr>
+            <a:spLocks noGrp="1"/>
+          </p:cNvSpPr>
+          <p:nvPr>
+            <p:ph idx="1"/>
+          </p:nvPr>
+        </p:nvSpPr>
+        <p:spPr>
+          <a:xfrm>
+            <a:off x="6434888" y="1825625"/>
+            <a:ext cx="4918911" cy="4351338"/>
+          </a:xfrm>
+        </p:spPr>
+        <p:txBody>
+          <a:bodyPr/>
+          <a:lstStyle/>
+          <a:p>
+            <a:r>
+              <a:rPr lang="hu-HU" dirty="0"/>
+              <a:t>A kód bekér egy megyekódot a felhasználótól majd ennek a megyének az információit írja ki. </a:t>
+            </a:r>
+          </a:p>
+          <a:p>
+            <a:r>
+              <a:rPr lang="hu-HU" dirty="0"/>
+              <a:t>Hibás bemenet esetén a kód minden adatra 0-t ír ki.</a:t>
+            </a:r>
+          </a:p>
+          <a:p>
+            <a:r>
+              <a:rPr lang="hu-HU" dirty="0"/>
+              <a:t>Helyes bemenet esetén a kód a feladatban kért információkat írja ki és a képen látható opciókat</a:t>
+            </a:r>
+            <a:endParaRPr lang="en-US" dirty="0"/>
+          </a:p>
+        </p:txBody>
+      </p:sp>
+      <p:sp>
+        <p:nvSpPr>
+          <p:cNvPr id="4" name="Dátum helye 3">
+            <a:extLst>
+              <a:ext uri="{FF2B5EF4-FFF2-40B4-BE49-F238E27FC236}">
+                <a16:creationId xmlns:a16="http://schemas.microsoft.com/office/drawing/2014/main" id="{662594D9-31D7-9FF3-81E5-FF3F7D6FE18A}"/>
+              </a:ext>
+            </a:extLst>
+          </p:cNvPr>
+          <p:cNvSpPr>
+            <a:spLocks noGrp="1"/>
+          </p:cNvSpPr>
+          <p:nvPr>
+            <p:ph type="dt" sz="half" idx="10"/>
+          </p:nvPr>
+        </p:nvSpPr>
+        <p:spPr/>
+        <p:txBody>
+          <a:bodyPr/>
+          <a:lstStyle/>
+          <a:p>
+            <a:fld id="{56682343-3180-46FB-B3C4-E2A140C8BC6B}" type="datetime1">
+              <a:rPr lang="hu-HU" smtClean="0"/>
+              <a:t>2026. 09. 20.</a:t>
+            </a:fld>
+            <a:endParaRPr lang="hu-HU" dirty="0"/>
+          </a:p>
+        </p:txBody>
+      </p:sp>
+      <p:sp>
+        <p:nvSpPr>
+          <p:cNvPr id="5" name="Dia számának helye 4">
+            <a:extLst>
+              <a:ext uri="{FF2B5EF4-FFF2-40B4-BE49-F238E27FC236}">
+                <a16:creationId xmlns:a16="http://schemas.microsoft.com/office/drawing/2014/main" id="{50C269EF-1681-A0DF-686E-F80E0FC09BA8}"/>
+              </a:ext>
+            </a:extLst>
+          </p:cNvPr>
+          <p:cNvSpPr>
+            <a:spLocks noGrp="1"/>
+          </p:cNvSpPr>
+          <p:nvPr>
+            <p:ph type="sldNum" sz="quarter" idx="12"/>
+          </p:nvPr>
+        </p:nvSpPr>
+        <p:spPr/>
+        <p:txBody>
+          <a:bodyPr/>
+          <a:lstStyle/>
+          <a:p>
+            <a:fld id="{1FABDF30-A028-4ADD-87D6-07D5E0A35220}" type="slidenum">
+              <a:rPr lang="hu-HU" smtClean="0"/>
+              <a:pPr/>
+              <a:t>3</a:t>
+            </a:fld>
+            <a:endParaRPr lang="hu-HU" dirty="0"/>
+          </a:p>
+        </p:txBody>
+      </p:sp>
+      <p:pic>
+        <p:nvPicPr>
+          <p:cNvPr id="7" name="Kép 6">
+            <a:extLst>
+              <a:ext uri="{FF2B5EF4-FFF2-40B4-BE49-F238E27FC236}">
+                <a16:creationId xmlns:a16="http://schemas.microsoft.com/office/drawing/2014/main" id="{E92B96BD-4E8C-CE01-CAA6-2DBB70706917}"/>
+              </a:ext>
+            </a:extLst>
+          </p:cNvPr>
+          <p:cNvPicPr>
+            <a:picLocks noChangeAspect="1"/>
+          </p:cNvPicPr>
+          <p:nvPr/>
+        </p:nvPicPr>
+        <p:blipFill>
+          <a:blip r:embed="rId2">
+            <a:extLst>
+              <a:ext uri="{28A0092B-C50C-407E-A947-70E740481C1C}">
+                <a14:useLocalDpi xmlns:a14="http://schemas.microsoft.com/office/drawing/2010/main" val="0"/>
+              </a:ext>
+            </a:extLst>
+          </a:blip>
+          <a:stretch>
+            <a:fillRect/>
+          </a:stretch>
+        </p:blipFill>
+        <p:spPr>
+          <a:xfrm>
+            <a:off x="838200" y="1926209"/>
+            <a:ext cx="4983947" cy="2164842"/>
+          </a:xfrm>
+          <a:prstGeom prst="foldedCorner">
+            <a:avLst/>
+          </a:prstGeom>
+        </p:spPr>
+      </p:pic>
+      <p:sp>
+        <p:nvSpPr>
+          <p:cNvPr id="10" name="Nyíl: balra mutató 9">
+            <a:hlinkClick r:id="rId3" action="ppaction://hlinksldjump"/>
+            <a:extLst>
+              <a:ext uri="{FF2B5EF4-FFF2-40B4-BE49-F238E27FC236}">
+                <a16:creationId xmlns:a16="http://schemas.microsoft.com/office/drawing/2014/main" id="{975B1FD0-BAE3-851E-484A-06486DEBAD04}"/>
+              </a:ext>
+            </a:extLst>
+          </p:cNvPr>
+          <p:cNvSpPr/>
+          <p:nvPr/>
+        </p:nvSpPr>
+        <p:spPr>
+          <a:xfrm>
+            <a:off x="8110728" y="6068314"/>
+            <a:ext cx="1911096" cy="576072"/>
+          </a:xfrm>
+          <a:prstGeom prst="leftArrow">
+            <a:avLst/>
+          </a:prstGeom>
+          <a:solidFill>
+            <a:srgbClr val="28C2FF"/>
+          </a:solidFill>
+        </p:spPr>
+        <p:style>
+          <a:lnRef idx="2">
+            <a:schemeClr val="accent1">
+              <a:shade val="15000"/>
+            </a:schemeClr>
+          </a:lnRef>
+          <a:fillRef idx="1">
+            <a:schemeClr val="accent1"/>
+          </a:fillRef>
+          <a:effectRef idx="0">
+            <a:schemeClr val="accent1"/>
+          </a:effectRef>
+          <a:fontRef idx="minor">
+            <a:schemeClr val="lt1"/>
+          </a:fontRef>
+        </p:style>
+        <p:txBody>
+          <a:bodyPr rtlCol="0" anchor="ctr"/>
+          <a:lstStyle/>
+          <a:p>
+            <a:pPr algn="ctr"/>
+            <a:endParaRPr lang="en-US"/>
+          </a:p>
+        </p:txBody>
+      </p:sp>
+      <p:sp>
+        <p:nvSpPr>
+          <p:cNvPr id="11" name="Szövegdoboz 10">
+            <a:hlinkClick r:id="rId3" action="ppaction://hlinksldjump"/>
+            <a:extLst>
+              <a:ext uri="{FF2B5EF4-FFF2-40B4-BE49-F238E27FC236}">
+                <a16:creationId xmlns:a16="http://schemas.microsoft.com/office/drawing/2014/main" id="{4D10CA94-7AAC-A545-698D-93CDDA50E3F7}"/>
+              </a:ext>
+            </a:extLst>
+          </p:cNvPr>
+          <p:cNvSpPr txBox="1"/>
+          <p:nvPr/>
+        </p:nvSpPr>
+        <p:spPr>
+          <a:xfrm>
+            <a:off x="8183880" y="6176963"/>
+            <a:ext cx="1975104" cy="369332"/>
+          </a:xfrm>
+          <a:prstGeom prst="rect">
+            <a:avLst/>
+          </a:prstGeom>
+          <a:noFill/>
+        </p:spPr>
+        <p:txBody>
+          <a:bodyPr wrap="square" rtlCol="0">
+            <a:spAutoFit/>
+          </a:bodyPr>
+          <a:lstStyle/>
+          <a:p>
+            <a:r>
+              <a:rPr lang="hu-HU" dirty="0">
+                <a:solidFill>
+                  <a:schemeClr val="bg1"/>
+                </a:solidFill>
+              </a:rPr>
+              <a:t>Vissza a főmenübe</a:t>
+            </a:r>
+            <a:endParaRPr lang="en-US" dirty="0">
+              <a:solidFill>
+                <a:schemeClr val="bg1"/>
+              </a:solidFill>
+            </a:endParaRPr>
+          </a:p>
+        </p:txBody>
+      </p:sp>
+      <p:sp>
+        <p:nvSpPr>
+          <p:cNvPr id="13" name="Szövegdoboz 12">
+            <a:extLst>
+              <a:ext uri="{FF2B5EF4-FFF2-40B4-BE49-F238E27FC236}">
+                <a16:creationId xmlns:a16="http://schemas.microsoft.com/office/drawing/2014/main" id="{CF7F129D-970F-89E6-8622-62E1850DEBE1}"/>
+              </a:ext>
+            </a:extLst>
+          </p:cNvPr>
+          <p:cNvSpPr txBox="1"/>
+          <p:nvPr/>
+        </p:nvSpPr>
+        <p:spPr>
+          <a:xfrm>
+            <a:off x="838200" y="4091051"/>
+            <a:ext cx="4983947" cy="369332"/>
+          </a:xfrm>
+          <a:prstGeom prst="rect">
+            <a:avLst/>
+          </a:prstGeom>
+          <a:noFill/>
+        </p:spPr>
+        <p:txBody>
+          <a:bodyPr wrap="square" rtlCol="0">
+            <a:spAutoFit/>
+          </a:bodyPr>
+          <a:lstStyle/>
+          <a:p>
+            <a:pPr algn="ctr"/>
+            <a:r>
+              <a:rPr lang="hu-HU" i="1" dirty="0">
+                <a:solidFill>
+                  <a:schemeClr val="bg1"/>
+                </a:solidFill>
+              </a:rPr>
+              <a:t>A kód helyes bemenet esetén</a:t>
+            </a:r>
+            <a:endParaRPr lang="en-US" i="1" dirty="0">
+              <a:solidFill>
+                <a:schemeClr val="bg1"/>
+              </a:solidFill>
+            </a:endParaRPr>
+          </a:p>
+        </p:txBody>
+      </p:sp>
+    </p:spTree>
+    <p:extLst>
+      <p:ext uri="{BB962C8B-B14F-4D97-AF65-F5344CB8AC3E}">
+        <p14:creationId xmlns:p14="http://schemas.microsoft.com/office/powerpoint/2010/main" val="1315290249"/>
+      </p:ext>
+    </p:extLst>
+  </p:cSld>
+  <p:clrMapOvr>
+    <a:masterClrMapping/>
+  </p:clrMapOvr>
+  <mc:AlternateContent xmlns:mc="http://schemas.openxmlformats.org/markup-compatibility/2006">
+    <mc:Choice xmlns:p15="http://schemas.microsoft.com/office/powerpoint/2012/main" Requires="p15">
+      <p:transition xmlns:p14="http://schemas.microsoft.com/office/powerpoint/2010/main" spd="slow" p14:dur="1250">
+        <p15:prstTrans prst="peelOff"/>
+      </p:transition>
+    </mc:Choice>
+    <mc:Fallback>
+      <p:transition spd="slow">
+        <p:fade/>
+      </p:transition>
+    </mc:Fallback>
+  </mc:AlternateContent>
+</p:sld>
+</file>
+
+<file path=ppt/slides/slide4.xml><?xml version="1.0" encoding="utf-8"?>
+<p:sld xmlns:a="http://schemas.openxmlformats.org/drawingml/2006/main" xmlns:r="http://schemas.openxmlformats.org/officeDocument/2006/relationships" xmlns:p="http://schemas.openxmlformats.org/presentationml/2006/main">
+  <p:cSld>
+    <p:spTree>
+      <p:nvGrpSpPr>
+        <p:cNvPr id="1" name=""/>
+        <p:cNvGrpSpPr/>
+        <p:nvPr/>
+      </p:nvGrpSpPr>
+      <p:grpSpPr>
+        <a:xfrm>
+          <a:off x="0" y="0"/>
+          <a:ext cx="0" cy="0"/>
+          <a:chOff x="0" y="0"/>
+          <a:chExt cx="0" cy="0"/>
+        </a:xfrm>
+      </p:grpSpPr>
+      <p:sp>
+        <p:nvSpPr>
+          <p:cNvPr id="2" name="Cím 1">
+            <a:extLst>
+              <a:ext uri="{FF2B5EF4-FFF2-40B4-BE49-F238E27FC236}">
+                <a16:creationId xmlns:a16="http://schemas.microsoft.com/office/drawing/2014/main" id="{AEB264A9-2BF2-9949-FDFF-0282F989738B}"/>
+              </a:ext>
+            </a:extLst>
+          </p:cNvPr>
+          <p:cNvSpPr>
+            <a:spLocks noGrp="1"/>
+          </p:cNvSpPr>
+          <p:nvPr>
+            <p:ph type="title"/>
+          </p:nvPr>
+        </p:nvSpPr>
+        <p:spPr/>
+        <p:txBody>
+          <a:bodyPr/>
+          <a:lstStyle/>
+          <a:p>
+            <a:r>
+              <a:rPr lang="hu-HU" dirty="0"/>
+              <a:t>Település típusai</a:t>
+            </a:r>
+            <a:endParaRPr lang="en-US" dirty="0"/>
+          </a:p>
+        </p:txBody>
+      </p:sp>
+      <p:sp>
+        <p:nvSpPr>
+          <p:cNvPr id="3" name="Tartalom helye 2">
+            <a:extLst>
+              <a:ext uri="{FF2B5EF4-FFF2-40B4-BE49-F238E27FC236}">
+                <a16:creationId xmlns:a16="http://schemas.microsoft.com/office/drawing/2014/main" id="{93CE30C4-169B-79AD-7D17-1E57D79033C9}"/>
+              </a:ext>
+            </a:extLst>
+          </p:cNvPr>
+          <p:cNvSpPr>
+            <a:spLocks noGrp="1"/>
+          </p:cNvSpPr>
+          <p:nvPr>
+            <p:ph idx="1"/>
+          </p:nvPr>
+        </p:nvSpPr>
+        <p:spPr>
+          <a:xfrm>
+            <a:off x="5266944" y="1825625"/>
+            <a:ext cx="6086856" cy="4351338"/>
+          </a:xfrm>
+        </p:spPr>
+        <p:txBody>
+          <a:bodyPr/>
+          <a:lstStyle/>
+          <a:p>
+            <a:r>
+              <a:rPr lang="hu-HU" dirty="0"/>
+              <a:t>A kód bekéri hogy a Magyarországon található települések közül milyen típusra kíváncsi.</a:t>
+            </a:r>
+          </a:p>
+          <a:p>
+            <a:r>
+              <a:rPr lang="hu-HU" dirty="0"/>
+              <a:t>Község esetén a kód kiírja az országban található községeket és nagyközségeket</a:t>
+            </a:r>
+          </a:p>
+          <a:p>
+            <a:r>
+              <a:rPr lang="hu-HU" dirty="0"/>
+              <a:t>Város esetén a kód kiírja az országban található városokat, vármegyeszékhelyeket, a vármegyei jogú városokat és a fővárosi kerületeket is</a:t>
+            </a:r>
+          </a:p>
+        </p:txBody>
+      </p:sp>
+      <p:sp>
+        <p:nvSpPr>
+          <p:cNvPr id="4" name="Dátum helye 3">
+            <a:extLst>
+              <a:ext uri="{FF2B5EF4-FFF2-40B4-BE49-F238E27FC236}">
+                <a16:creationId xmlns:a16="http://schemas.microsoft.com/office/drawing/2014/main" id="{8CA33A81-A81E-C5DC-4170-508A3E5BEFD7}"/>
+              </a:ext>
+            </a:extLst>
+          </p:cNvPr>
+          <p:cNvSpPr>
+            <a:spLocks noGrp="1"/>
+          </p:cNvSpPr>
+          <p:nvPr>
+            <p:ph type="dt" sz="half" idx="10"/>
+          </p:nvPr>
+        </p:nvSpPr>
+        <p:spPr/>
+        <p:txBody>
+          <a:bodyPr/>
+          <a:lstStyle/>
+          <a:p>
+            <a:fld id="{56682343-3180-46FB-B3C4-E2A140C8BC6B}" type="datetime1">
+              <a:rPr lang="hu-HU" smtClean="0"/>
+              <a:t>2026. 09. 20.</a:t>
+            </a:fld>
+            <a:endParaRPr lang="hu-HU"/>
+          </a:p>
+        </p:txBody>
+      </p:sp>
+      <p:sp>
+        <p:nvSpPr>
+          <p:cNvPr id="5" name="Dia számának helye 4">
+            <a:extLst>
+              <a:ext uri="{FF2B5EF4-FFF2-40B4-BE49-F238E27FC236}">
+                <a16:creationId xmlns:a16="http://schemas.microsoft.com/office/drawing/2014/main" id="{65088E00-81DB-CAEF-7ECD-23AFA31DEC22}"/>
+              </a:ext>
+            </a:extLst>
+          </p:cNvPr>
+          <p:cNvSpPr>
+            <a:spLocks noGrp="1"/>
+          </p:cNvSpPr>
+          <p:nvPr>
+            <p:ph type="sldNum" sz="quarter" idx="12"/>
+          </p:nvPr>
+        </p:nvSpPr>
+        <p:spPr/>
+        <p:txBody>
+          <a:bodyPr/>
+          <a:lstStyle/>
+          <a:p>
+            <a:fld id="{1FABDF30-A028-4ADD-87D6-07D5E0A35220}" type="slidenum">
+              <a:rPr lang="hu-HU" smtClean="0"/>
+              <a:pPr/>
+              <a:t>4</a:t>
+            </a:fld>
+            <a:endParaRPr lang="hu-HU" dirty="0"/>
+          </a:p>
+        </p:txBody>
+      </p:sp>
+      <p:sp>
+        <p:nvSpPr>
+          <p:cNvPr id="6" name="Nyíl: balra mutató 5">
+            <a:hlinkClick r:id="rId2" action="ppaction://hlinksldjump"/>
+            <a:extLst>
+              <a:ext uri="{FF2B5EF4-FFF2-40B4-BE49-F238E27FC236}">
+                <a16:creationId xmlns:a16="http://schemas.microsoft.com/office/drawing/2014/main" id="{2A43009F-B24E-768F-C6D7-3951DFD90621}"/>
+              </a:ext>
+            </a:extLst>
+          </p:cNvPr>
+          <p:cNvSpPr/>
+          <p:nvPr/>
+        </p:nvSpPr>
+        <p:spPr>
+          <a:xfrm>
+            <a:off x="7897368" y="6099365"/>
+            <a:ext cx="1911096" cy="576072"/>
+          </a:xfrm>
+          <a:prstGeom prst="leftArrow">
+            <a:avLst/>
+          </a:prstGeom>
+          <a:solidFill>
+            <a:srgbClr val="28C2FF"/>
+          </a:solidFill>
+        </p:spPr>
+        <p:style>
+          <a:lnRef idx="2">
+            <a:schemeClr val="accent1">
+              <a:shade val="15000"/>
+            </a:schemeClr>
+          </a:lnRef>
+          <a:fillRef idx="1">
+            <a:schemeClr val="accent1"/>
+          </a:fillRef>
+          <a:effectRef idx="0">
+            <a:schemeClr val="accent1"/>
+          </a:effectRef>
+          <a:fontRef idx="minor">
+            <a:schemeClr val="lt1"/>
+          </a:fontRef>
+        </p:style>
+        <p:txBody>
+          <a:bodyPr rtlCol="0" anchor="ctr"/>
+          <a:lstStyle/>
+          <a:p>
+            <a:pPr algn="ctr"/>
+            <a:endParaRPr lang="en-US"/>
+          </a:p>
+        </p:txBody>
+      </p:sp>
+      <p:sp>
+        <p:nvSpPr>
+          <p:cNvPr id="7" name="Szövegdoboz 6">
+            <a:hlinkClick r:id="rId2" action="ppaction://hlinksldjump"/>
+            <a:extLst>
+              <a:ext uri="{FF2B5EF4-FFF2-40B4-BE49-F238E27FC236}">
+                <a16:creationId xmlns:a16="http://schemas.microsoft.com/office/drawing/2014/main" id="{9B9A7AAE-5EBB-B621-4B95-4A3895843093}"/>
+              </a:ext>
+            </a:extLst>
+          </p:cNvPr>
+          <p:cNvSpPr txBox="1"/>
+          <p:nvPr/>
+        </p:nvSpPr>
+        <p:spPr>
+          <a:xfrm>
+            <a:off x="7970520" y="6208014"/>
+            <a:ext cx="1975104" cy="369332"/>
+          </a:xfrm>
+          <a:prstGeom prst="rect">
+            <a:avLst/>
+          </a:prstGeom>
+          <a:noFill/>
+        </p:spPr>
+        <p:txBody>
+          <a:bodyPr wrap="square" rtlCol="0">
+            <a:spAutoFit/>
+          </a:bodyPr>
+          <a:lstStyle/>
+          <a:p>
+            <a:r>
+              <a:rPr lang="hu-HU" dirty="0">
+                <a:solidFill>
+                  <a:schemeClr val="bg1"/>
+                </a:solidFill>
+              </a:rPr>
+              <a:t>Vissza a főmenübe</a:t>
+            </a:r>
+            <a:endParaRPr lang="en-US" dirty="0">
+              <a:solidFill>
+                <a:schemeClr val="bg1"/>
+              </a:solidFill>
+            </a:endParaRPr>
+          </a:p>
+        </p:txBody>
+      </p:sp>
+    </p:spTree>
+    <p:extLst>
+      <p:ext uri="{BB962C8B-B14F-4D97-AF65-F5344CB8AC3E}">
+        <p14:creationId xmlns:p14="http://schemas.microsoft.com/office/powerpoint/2010/main" val="1441079874"/>
+      </p:ext>
+    </p:extLst>
+  </p:cSld>
+  <p:clrMapOvr>
+    <a:masterClrMapping/>
+  </p:clrMapOvr>
+  <mc:AlternateContent xmlns:mc="http://schemas.openxmlformats.org/markup-compatibility/2006">
+    <mc:Choice xmlns:p15="http://schemas.microsoft.com/office/powerpoint/2012/main" Requires="p15">
+      <p:transition xmlns:p14="http://schemas.microsoft.com/office/powerpoint/2010/main" spd="slow" p14:dur="1250">
+        <p15:prstTrans prst="peelOff"/>
+      </p:transition>
+    </mc:Choice>
+    <mc:Fallback>
+      <p:transition spd="slow">
+        <p:fade/>
+      </p:transition>
+    </mc:Fallback>
+  </mc:AlternateContent>
 </p:sld>
 </file>
 

--- a/Népesség 2025 projekt.pptx
+++ b/Népesség 2025 projekt.pptx
@@ -4030,12 +4030,16 @@
               <a:t> </a:t>
             </a:r>
             <a:r>
-              <a:rPr lang="hu-HU" dirty="0" err="1"/>
-              <a:t>dániel</a:t>
-            </a:r>
-            <a:r>
               <a:rPr lang="hu-HU" dirty="0"/>
-              <a:t> &amp; Kóti-Jószai Simon</a:t>
+              <a:t>D</a:t>
+            </a:r>
+            <a:r>
+              <a:rPr lang="hu-HU" dirty="0" smtClean="0"/>
+              <a:t>ániel </a:t>
+            </a:r>
+            <a:r>
+              <a:rPr lang="hu-HU" dirty="0"/>
+              <a:t>&amp; Kóti-Jószai Simon</a:t>
             </a:r>
           </a:p>
         </p:txBody>
@@ -4591,13 +4595,13 @@
   <p:clrMapOvr>
     <a:masterClrMapping/>
   </p:clrMapOvr>
-  <mc:AlternateContent xmlns:mc="http://schemas.openxmlformats.org/markup-compatibility/2006">
-    <mc:Choice xmlns:p15="http://schemas.microsoft.com/office/powerpoint/2012/main" Requires="p15">
+  <mc:AlternateContent xmlns:mc="http://schemas.openxmlformats.org/markup-compatibility/2006" xmlns:p15="http://schemas.microsoft.com/office/powerpoint/2012/main">
+    <mc:Choice Requires="p15">
       <p:transition xmlns:p14="http://schemas.microsoft.com/office/powerpoint/2010/main" spd="slow" p14:dur="1250">
         <p15:prstTrans prst="peelOff"/>
       </p:transition>
     </mc:Choice>
-    <mc:Fallback>
+    <mc:Fallback xmlns="">
       <p:transition spd="slow">
         <p:fade/>
       </p:transition>
@@ -5336,13 +5340,13 @@
   <p:clrMapOvr>
     <a:masterClrMapping/>
   </p:clrMapOvr>
-  <mc:AlternateContent xmlns:mc="http://schemas.openxmlformats.org/markup-compatibility/2006">
-    <mc:Choice xmlns:p15="http://schemas.microsoft.com/office/powerpoint/2012/main" Requires="p15">
+  <mc:AlternateContent xmlns:mc="http://schemas.openxmlformats.org/markup-compatibility/2006" xmlns:p15="http://schemas.microsoft.com/office/powerpoint/2012/main">
+    <mc:Choice Requires="p15">
       <p:transition xmlns:p14="http://schemas.microsoft.com/office/powerpoint/2010/main" spd="slow" p14:dur="1250">
         <p15:prstTrans prst="peelOff"/>
       </p:transition>
     </mc:Choice>
-    <mc:Fallback>
+    <mc:Fallback xmlns="">
       <p:transition spd="slow">
         <p:fade/>
       </p:transition>
@@ -5606,13 +5610,13 @@
   <p:clrMapOvr>
     <a:masterClrMapping/>
   </p:clrMapOvr>
-  <mc:AlternateContent xmlns:mc="http://schemas.openxmlformats.org/markup-compatibility/2006">
-    <mc:Choice xmlns:p15="http://schemas.microsoft.com/office/powerpoint/2012/main" Requires="p15">
+  <mc:AlternateContent xmlns:mc="http://schemas.openxmlformats.org/markup-compatibility/2006" xmlns:p15="http://schemas.microsoft.com/office/powerpoint/2012/main">
+    <mc:Choice Requires="p15">
       <p:transition xmlns:p14="http://schemas.microsoft.com/office/powerpoint/2010/main" spd="slow" p14:dur="1250">
         <p15:prstTrans prst="peelOff"/>
       </p:transition>
     </mc:Choice>
-    <mc:Fallback>
+    <mc:Fallback xmlns="">
       <p:transition spd="slow">
         <p:fade/>
       </p:transition>
